--- a/media/resources/files/Onduktar_Koboytuu_SandykBashkatyrma_EmEvlaO.pptx
+++ b/media/resources/files/Onduktar_Koboytuu_SandykBashkatyrma_EmEvlaO.pptx
@@ -2034,7 +2034,7 @@
                 <a:ea typeface="+mn-ea"/>
                 <a:cs typeface="+mn-cs"/>
               </a:rPr>
-              <a:t>Турдуу пикирлер учун ыраазычылык билдиребиз.</a:t>
+              <a:t>Түрдүү пикирлер үчүн ыраазычылык билдиребиз.</a:t>
             </a:r>
           </a:p>
           <a:p>

--- a/media/resources/files/Onduktar_Koboytuu_SandykBashkatyrma_EmEvlaO.pptx
+++ b/media/resources/files/Onduktar_Koboytuu_SandykBashkatyrma_EmEvlaO.pptx
@@ -3164,7 +3164,7 @@
           <a:p>
             <a:r>
               <a:rPr lang="en-GB" sz="2400" dirty="0"/>
-              <a:t>0.2 × 0.3 = 0.06</a:t>
+              <a:t>0,2 × 0,3 = 0,06</a:t>
             </a:r>
           </a:p>
         </p:txBody>
@@ -3786,7 +3786,7 @@
           <a:p>
             <a:r>
               <a:rPr lang="en-GB" sz="2400" dirty="0"/>
-              <a:t>0.9 × 0.8 = 0.72</a:t>
+              <a:t>0,9 × 0,8 = 0,72</a:t>
             </a:r>
           </a:p>
         </p:txBody>
@@ -3821,7 +3821,7 @@
           <a:p>
             <a:r>
               <a:rPr lang="en-GB" sz="2400" dirty="0"/>
-              <a:t>0.7 × 0.8 = 0.56</a:t>
+              <a:t>0,7 × 0,8 = 0,56</a:t>
             </a:r>
           </a:p>
         </p:txBody>
@@ -4693,7 +4693,7 @@
           <a:p>
             <a:r>
               <a:rPr lang="en-GB" sz="2400" dirty="0"/>
-              <a:t>6.4 × 0.8 = 5.12</a:t>
+              <a:t>6,4 × 0,8 = 5,12</a:t>
             </a:r>
           </a:p>
         </p:txBody>
@@ -5369,7 +5369,7 @@
           <a:p>
             <a:r>
               <a:rPr lang="en-GB" sz="2400" dirty="0"/>
-              <a:t>6.4 × 0.5 = 3.20</a:t>
+              <a:t>6,4 × 0,5 = 3,20</a:t>
             </a:r>
           </a:p>
         </p:txBody>
@@ -5404,7 +5404,7 @@
           <a:p>
             <a:r>
               <a:rPr lang="en-GB" sz="2400" dirty="0"/>
-              <a:t>1.2 × 0.8 = 0.96</a:t>
+              <a:t>1,2 × 0,8 = 0,96</a:t>
             </a:r>
           </a:p>
         </p:txBody>
@@ -5439,7 +5439,7 @@
           <a:p>
             <a:r>
               <a:rPr lang="en-GB" sz="2400" dirty="0"/>
-              <a:t>4.2 × 0.9 = 3.78</a:t>
+              <a:t>4,2 × 0,9 = 3,78</a:t>
             </a:r>
           </a:p>
         </p:txBody>
@@ -5474,7 +5474,7 @@
           <a:p>
             <a:r>
               <a:rPr lang="en-GB" sz="2400" dirty="0"/>
-              <a:t>3.4 × 0.2 = 0.68</a:t>
+              <a:t>3,4 × 0,2 = 0,68</a:t>
             </a:r>
           </a:p>
         </p:txBody>
@@ -5509,7 +5509,7 @@
           <a:p>
             <a:r>
               <a:rPr lang="en-GB" sz="2400" dirty="0"/>
-              <a:t>2.6 × 0.3 = 0.78</a:t>
+              <a:t>2,6 × 0,3 = 0,78</a:t>
             </a:r>
           </a:p>
         </p:txBody>
@@ -5544,7 +5544,7 @@
           <a:p>
             <a:r>
               <a:rPr lang="en-GB" sz="2400" dirty="0"/>
-              <a:t>9.6 × 0.5 = 4.80</a:t>
+              <a:t>9,6 × 0,5 = 4,80</a:t>
             </a:r>
           </a:p>
         </p:txBody>
@@ -5579,7 +5579,7 @@
           <a:p>
             <a:r>
               <a:rPr lang="en-GB" sz="2400" dirty="0"/>
-              <a:t>1.2 × 0.7 = 0.84</a:t>
+              <a:t>1,2 × 0,7 = 0,84</a:t>
             </a:r>
           </a:p>
         </p:txBody>
